--- a/스포츠안전재단_FGI_송출자료(안)_v0.1.pptx
+++ b/스포츠안전재단_FGI_송출자료(안)_v0.1.pptx
@@ -19,9 +19,10 @@
     <p:sldId id="267" r:id="rId13"/>
     <p:sldId id="268" r:id="rId14"/>
     <p:sldId id="269" r:id="rId15"/>
+    <p:sldId id="270" r:id="rId16"/>
   </p:sldIdLst>
   <p:notesMasterIdLst>
-    <p:notesMasterId r:id="rId16"/>
+    <p:notesMasterId r:id="rId17"/>
   </p:notesMasterIdLst>
   <p:sldSz cx="9144000" cy="5143500"/>
   <p:notesSz cx="5143500" cy="9144000"/>
@@ -955,7 +956,7 @@
           <a:p>
             <a:r>
               <a:rPr lang="en-US" dirty="0"/>
-              <a:t>송출과 동시에 등록 관리가 Top 3 개인 작성 용지를 배부한다. 3분 뒤 회수하고, 오거나이저가 참석자별 1~3순위를 그대로 옮겨 적는다. 공유 후 ‘지표관리 체계(OLS 기반)를 자체 운영한다면 어떤 역량과 지원이 필요합니까?’로 마무리.</a:t>
+              <a:t>재단이 제공한 공식 안내 포스터의 문안·표·문의처를 그대로 옮긴 슬라이드다(캐릭터·QR 등 그래픽 제외). 원본 포스터 이미지 파일이 있으면 이 슬라이드 위에 삽입해 교체해도 된다(세로형이므로 좌측에 이미지, 우측에 가입기준 강조 문구 배치 권장). 그룹 1 법·제도 파트에서 13장에 이어 송출하고, 재단 관계자 배석 시에는 이 장을 우선 사용한다.</a:t>
             </a:r>
             <a:endParaRPr lang="en-US" dirty="0"/>
           </a:p>
@@ -979,6 +980,94 @@
             <a:fld id="{F7021451-1387-4CA6-816F-3879F97B5CBC}" type="slidenum">
               <a:rPr lang="en-US"/>
               <a:t>14</a:t>
+            </a:fld>
+            <a:endParaRPr lang="en-US"/>
+          </a:p>
+        </p:txBody>
+      </p:sp>
+    </p:spTree>
+    <p:extLst>
+      <p:ext uri="{BB962C8B-B14F-4D97-AF65-F5344CB8AC3E}">
+        <p14:creationId xmlns:p14="http://schemas.microsoft.com/office/powerpoint/2010/main" val="1024086991"/>
+      </p:ext>
+    </p:extLst>
+  </p:cSld>
+  <p:clrMapOvr>
+    <a:masterClrMapping/>
+  </p:clrMapOvr>
+</p:notes>
+</file>
+
+<file path=ppt/notesSlides/notesSlide15.xml><?xml version="1.0" encoding="utf-8"?>
+<p:notes xmlns:a="http://schemas.openxmlformats.org/drawingml/2006/main" xmlns:r="http://schemas.openxmlformats.org/officeDocument/2006/relationships" xmlns:p="http://schemas.openxmlformats.org/presentationml/2006/main">
+  <p:cSld>
+    <p:spTree>
+      <p:nvGrpSpPr>
+        <p:cNvPr id="1" name=""/>
+        <p:cNvGrpSpPr/>
+        <p:nvPr/>
+      </p:nvGrpSpPr>
+      <p:grpSpPr>
+        <a:xfrm>
+          <a:off x="0" y="0"/>
+          <a:ext cx="0" cy="0"/>
+          <a:chOff x="0" y="0"/>
+          <a:chExt cx="0" cy="0"/>
+        </a:xfrm>
+      </p:grpSpPr>
+      <p:sp>
+        <p:nvSpPr>
+          <p:cNvPr id="2" name="Slide Image Placeholder 1"/>
+          <p:cNvSpPr>
+            <a:spLocks noGrp="1" noRot="1" noChangeAspect="1"/>
+          </p:cNvSpPr>
+          <p:nvPr>
+            <p:ph type="sldImg"/>
+          </p:nvPr>
+        </p:nvSpPr>
+        <p:spPr/>
+      </p:sp>
+      <p:sp>
+        <p:nvSpPr>
+          <p:cNvPr id="3" name="Notes Placeholder 2"/>
+          <p:cNvSpPr>
+            <a:spLocks noGrp="1"/>
+          </p:cNvSpPr>
+          <p:nvPr>
+            <p:ph type="body" idx="1"/>
+          </p:nvPr>
+        </p:nvSpPr>
+        <p:spPr/>
+        <p:txBody>
+          <a:bodyPr/>
+          <a:lstStyle/>
+          <a:p>
+            <a:r>
+              <a:rPr lang="en-US" dirty="0"/>
+              <a:t>송출과 동시에 등록 관리가 Top 3 개인 작성 용지를 배부한다. 3분 뒤 회수하고, 오거나이저가 참석자별 1~3순위를 그대로 옮겨 적는다. 공유 후 ‘지표관리 체계(OLS 기반)를 자체 운영한다면 어떤 역량과 지원이 필요합니까?’로 마무리.</a:t>
+            </a:r>
+            <a:endParaRPr lang="en-US" dirty="0"/>
+          </a:p>
+        </p:txBody>
+      </p:sp>
+      <p:sp>
+        <p:nvSpPr>
+          <p:cNvPr id="4" name="Slide Number Placeholder 3"/>
+          <p:cNvSpPr>
+            <a:spLocks noGrp="1"/>
+          </p:cNvSpPr>
+          <p:nvPr>
+            <p:ph type="sldNum" sz="quarter" idx="10"/>
+          </p:nvPr>
+        </p:nvSpPr>
+        <p:spPr/>
+        <p:txBody>
+          <a:bodyPr/>
+          <a:lstStyle/>
+          <a:p>
+            <a:fld id="{F7021451-1387-4CA6-816F-3879F97B5CBC}" type="slidenum">
+              <a:rPr lang="en-US"/>
+              <a:t>15</a:t>
             </a:fld>
             <a:endParaRPr lang="en-US"/>
           </a:p>
@@ -6302,6 +6391,1675 @@
                 <a:ea typeface="Malgun Gothic" pitchFamily="34" charset="-122"/>
                 <a:cs typeface="Malgun Gothic" pitchFamily="34" charset="-120"/>
               </a:rPr>
+              <a:t>재난안전의무보험 가입기준 안내</a:t>
+            </a:r>
+            <a:endParaRPr lang="en-US" sz="2400" dirty="0"/>
+          </a:p>
+        </p:txBody>
+      </p:sp>
+      <p:sp>
+        <p:nvSpPr>
+          <p:cNvPr id="5" name="Text 2"/>
+          <p:cNvSpPr txBox="1"/>
+          <p:nvPr/>
+        </p:nvSpPr>
+        <p:spPr>
+          <a:xfrm>
+            <a:off x="1051560" y="749808"/>
+            <a:ext cx="7589520" cy="320040"/>
+          </a:xfrm>
+          <a:prstGeom prst="rect">
+            <a:avLst/>
+          </a:prstGeom>
+          <a:noFill/>
+          <a:ln/>
+        </p:spPr>
+        <p:txBody>
+          <a:bodyPr wrap="square" lIns="0" tIns="0" rIns="0" bIns="0" rtlCol="0" anchor="ctr"/>
+          <a:lstStyle/>
+          <a:p>
+            <a:pPr indent="0" marL="0">
+              <a:buNone/>
+            </a:pPr>
+            <a:r>
+              <a:rPr lang="en-US" sz="1200" dirty="0">
+                <a:solidFill>
+                  <a:srgbClr val="5B6B7A"/>
+                </a:solidFill>
+                <a:latin typeface="Malgun Gothic" pitchFamily="34" charset="0"/>
+                <a:ea typeface="Malgun Gothic" pitchFamily="34" charset="-122"/>
+                <a:cs typeface="Malgun Gothic" pitchFamily="34" charset="-120"/>
+              </a:rPr>
+              <a:t>「재난 및 안전관리 기본법」에 따른 안내 — 스포츠안전재단 공식 안내문 재구성</a:t>
+            </a:r>
+            <a:endParaRPr lang="en-US" sz="1200" dirty="0"/>
+          </a:p>
+        </p:txBody>
+      </p:sp>
+      <p:sp>
+        <p:nvSpPr>
+          <p:cNvPr id="6" name="Shape 3"/>
+          <p:cNvSpPr/>
+          <p:nvPr/>
+        </p:nvSpPr>
+        <p:spPr>
+          <a:xfrm>
+            <a:off x="5669280" y="292608"/>
+            <a:ext cx="3017520" cy="329184"/>
+          </a:xfrm>
+          <a:prstGeom prst="roundRect">
+            <a:avLst>
+              <a:gd name="adj" fmla="val 50000"/>
+            </a:avLst>
+          </a:prstGeom>
+          <a:solidFill>
+            <a:srgbClr val="DCEAF4"/>
+          </a:solidFill>
+          <a:ln w="12700">
+            <a:solidFill>
+              <a:srgbClr val="DCEAF4"/>
+            </a:solidFill>
+            <a:prstDash val="solid"/>
+          </a:ln>
+        </p:spPr>
+      </p:sp>
+      <p:sp>
+        <p:nvSpPr>
+          <p:cNvPr id="7" name="Text 4"/>
+          <p:cNvSpPr txBox="1"/>
+          <p:nvPr/>
+        </p:nvSpPr>
+        <p:spPr>
+          <a:xfrm>
+            <a:off x="5669280" y="292608"/>
+            <a:ext cx="3017520" cy="329184"/>
+          </a:xfrm>
+          <a:prstGeom prst="rect">
+            <a:avLst/>
+          </a:prstGeom>
+          <a:noFill/>
+          <a:ln/>
+        </p:spPr>
+        <p:txBody>
+          <a:bodyPr wrap="square" lIns="0" tIns="0" rIns="0" bIns="0" rtlCol="0" anchor="ctr"/>
+          <a:lstStyle/>
+          <a:p>
+            <a:pPr algn="ctr" indent="0" marL="0">
+              <a:buNone/>
+            </a:pPr>
+            <a:r>
+              <a:rPr lang="en-US" sz="1050" b="1" dirty="0">
+                <a:solidFill>
+                  <a:srgbClr val="0B3C5D"/>
+                </a:solidFill>
+                <a:latin typeface="Malgun Gothic" pitchFamily="34" charset="0"/>
+                <a:ea typeface="Malgun Gothic" pitchFamily="34" charset="-122"/>
+                <a:cs typeface="Malgun Gothic" pitchFamily="34" charset="-120"/>
+              </a:rPr>
+              <a:t>그룹 1 · 법·제도 인식 (2·4 보조)</a:t>
+            </a:r>
+            <a:endParaRPr lang="en-US" sz="1050" dirty="0"/>
+          </a:p>
+        </p:txBody>
+      </p:sp>
+      <p:sp>
+        <p:nvSpPr>
+          <p:cNvPr id="8" name="Shape 5"/>
+          <p:cNvSpPr/>
+          <p:nvPr/>
+        </p:nvSpPr>
+        <p:spPr>
+          <a:xfrm>
+            <a:off x="457200" y="1188720"/>
+            <a:ext cx="8229600" cy="713232"/>
+          </a:xfrm>
+          <a:prstGeom prst="roundRect">
+            <a:avLst>
+              <a:gd name="adj" fmla="val 15385"/>
+            </a:avLst>
+          </a:prstGeom>
+          <a:solidFill>
+            <a:srgbClr val="0B3C5D"/>
+          </a:solidFill>
+          <a:ln w="12700">
+            <a:solidFill>
+              <a:srgbClr val="0B3C5D"/>
+            </a:solidFill>
+            <a:prstDash val="solid"/>
+          </a:ln>
+        </p:spPr>
+      </p:sp>
+      <p:sp>
+        <p:nvSpPr>
+          <p:cNvPr id="9" name="Text 6"/>
+          <p:cNvSpPr txBox="1"/>
+          <p:nvPr/>
+        </p:nvSpPr>
+        <p:spPr>
+          <a:xfrm>
+            <a:off x="685800" y="1188720"/>
+            <a:ext cx="7772400" cy="713232"/>
+          </a:xfrm>
+          <a:prstGeom prst="rect">
+            <a:avLst/>
+          </a:prstGeom>
+          <a:noFill/>
+          <a:ln/>
+        </p:spPr>
+        <p:txBody>
+          <a:bodyPr wrap="square" lIns="0" tIns="0" rIns="0" bIns="0" rtlCol="0" anchor="ctr"/>
+          <a:lstStyle/>
+          <a:p>
+            <a:pPr indent="0" marL="0">
+              <a:buNone/>
+            </a:pPr>
+            <a:r>
+              <a:rPr lang="en-US" sz="1150" b="1" dirty="0">
+                <a:solidFill>
+                  <a:srgbClr val="E0A526"/>
+                </a:solidFill>
+                <a:latin typeface="Malgun Gothic" pitchFamily="34" charset="0"/>
+                <a:ea typeface="Malgun Gothic" pitchFamily="34" charset="-122"/>
+                <a:cs typeface="Malgun Gothic" pitchFamily="34" charset="-120"/>
+              </a:rPr>
+              <a:t>재난안전의무보험이란?  </a:t>
+            </a:r>
+            <a:pPr indent="0" marL="0">
+              <a:buNone/>
+            </a:pPr>
+            <a:r>
+              <a:rPr lang="en-US" sz="1150" dirty="0">
+                <a:solidFill>
+                  <a:srgbClr val="FFFFFF"/>
+                </a:solidFill>
+                <a:latin typeface="Malgun Gothic" pitchFamily="34" charset="0"/>
+                <a:ea typeface="Malgun Gothic" pitchFamily="34" charset="-122"/>
+                <a:cs typeface="Malgun Gothic" pitchFamily="34" charset="-120"/>
+              </a:rPr>
+              <a:t>재난이나 그 밖의 각종 사고로 사람의 생명·신체 또는 재산에 피해가 발생한 경우 그 피해를 보상하기 위해 법률에 따라 일정한 자에 대하여 가입을 강제하는 보험 또는 공제 (「재난 및 안전관리 기본법」 제3조제10호의2)</a:t>
+            </a:r>
+            <a:endParaRPr lang="en-US" sz="1150" dirty="0"/>
+          </a:p>
+        </p:txBody>
+      </p:sp>
+      <p:sp>
+        <p:nvSpPr>
+          <p:cNvPr id="10" name="Shape 7"/>
+          <p:cNvSpPr/>
+          <p:nvPr/>
+        </p:nvSpPr>
+        <p:spPr>
+          <a:xfrm>
+            <a:off x="457200" y="2029968"/>
+            <a:ext cx="5074920" cy="2377440"/>
+          </a:xfrm>
+          <a:prstGeom prst="roundRect">
+            <a:avLst>
+              <a:gd name="adj" fmla="val 4615"/>
+            </a:avLst>
+          </a:prstGeom>
+          <a:solidFill>
+            <a:srgbClr val="F1F6FA"/>
+          </a:solidFill>
+          <a:ln w="12700">
+            <a:solidFill>
+              <a:srgbClr val="F1F6FA"/>
+            </a:solidFill>
+            <a:prstDash val="solid"/>
+          </a:ln>
+        </p:spPr>
+      </p:sp>
+      <p:sp>
+        <p:nvSpPr>
+          <p:cNvPr id="11" name="Text 8"/>
+          <p:cNvSpPr txBox="1"/>
+          <p:nvPr/>
+        </p:nvSpPr>
+        <p:spPr>
+          <a:xfrm>
+            <a:off x="640080" y="2103120"/>
+            <a:ext cx="4754880" cy="292608"/>
+          </a:xfrm>
+          <a:prstGeom prst="rect">
+            <a:avLst/>
+          </a:prstGeom>
+          <a:noFill/>
+          <a:ln/>
+        </p:spPr>
+        <p:txBody>
+          <a:bodyPr wrap="square" lIns="0" tIns="0" rIns="0" bIns="0" rtlCol="0" anchor="ctr"/>
+          <a:lstStyle/>
+          <a:p>
+            <a:pPr indent="0" marL="0">
+              <a:buNone/>
+            </a:pPr>
+            <a:r>
+              <a:rPr lang="en-US" sz="1150" b="1" dirty="0">
+                <a:solidFill>
+                  <a:srgbClr val="0B3C5D"/>
+                </a:solidFill>
+                <a:latin typeface="Malgun Gothic" pitchFamily="34" charset="0"/>
+                <a:ea typeface="Malgun Gothic" pitchFamily="34" charset="-122"/>
+                <a:cs typeface="Malgun Gothic" pitchFamily="34" charset="-120"/>
+              </a:rPr>
+              <a:t>재난안전의무보험 종류  </a:t>
+            </a:r>
+            <a:pPr indent="0" marL="0">
+              <a:buNone/>
+            </a:pPr>
+            <a:r>
+              <a:rPr lang="en-US" sz="1150" dirty="0">
+                <a:solidFill>
+                  <a:srgbClr val="1F2933"/>
+                </a:solidFill>
+                <a:latin typeface="Malgun Gothic" pitchFamily="34" charset="0"/>
+                <a:ea typeface="Malgun Gothic" pitchFamily="34" charset="-122"/>
+                <a:cs typeface="Malgun Gothic" pitchFamily="34" charset="-120"/>
+              </a:rPr>
+              <a:t>‘교육·스포츠’ 포함 9개 사회분야, 총 64종</a:t>
+            </a:r>
+            <a:endParaRPr lang="en-US" sz="1150" dirty="0"/>
+          </a:p>
+        </p:txBody>
+      </p:sp>
+      <p:sp>
+        <p:nvSpPr>
+          <p:cNvPr id="12" name="Text 9"/>
+          <p:cNvSpPr txBox="1"/>
+          <p:nvPr/>
+        </p:nvSpPr>
+        <p:spPr>
+          <a:xfrm>
+            <a:off x="640080" y="2395728"/>
+            <a:ext cx="4754880" cy="292608"/>
+          </a:xfrm>
+          <a:prstGeom prst="rect">
+            <a:avLst/>
+          </a:prstGeom>
+          <a:noFill/>
+          <a:ln/>
+        </p:spPr>
+        <p:txBody>
+          <a:bodyPr wrap="square" lIns="0" tIns="0" rIns="0" bIns="0" rtlCol="0" anchor="ctr"/>
+          <a:lstStyle/>
+          <a:p>
+            <a:pPr indent="0" marL="0">
+              <a:buNone/>
+            </a:pPr>
+            <a:r>
+              <a:rPr lang="en-US" sz="1150" b="1" dirty="0">
+                <a:solidFill>
+                  <a:srgbClr val="0B3C5D"/>
+                </a:solidFill>
+                <a:latin typeface="Malgun Gothic" pitchFamily="34" charset="0"/>
+                <a:ea typeface="Malgun Gothic" pitchFamily="34" charset="-122"/>
+                <a:cs typeface="Malgun Gothic" pitchFamily="34" charset="-120"/>
+              </a:rPr>
+              <a:t>스포츠 분야 의무보험  </a:t>
+            </a:r>
+            <a:pPr indent="0" marL="0">
+              <a:buNone/>
+            </a:pPr>
+            <a:r>
+              <a:rPr lang="en-US" sz="1150" dirty="0">
+                <a:solidFill>
+                  <a:srgbClr val="1F2933"/>
+                </a:solidFill>
+                <a:latin typeface="Malgun Gothic" pitchFamily="34" charset="0"/>
+                <a:ea typeface="Malgun Gothic" pitchFamily="34" charset="-122"/>
+                <a:cs typeface="Malgun Gothic" pitchFamily="34" charset="-120"/>
+              </a:rPr>
+              <a:t>생활체육안전보험, 운동경기대회배상책임보험</a:t>
+            </a:r>
+            <a:endParaRPr lang="en-US" sz="1150" dirty="0"/>
+          </a:p>
+        </p:txBody>
+      </p:sp>
+      <p:graphicFrame>
+        <p:nvGraphicFramePr>
+          <p:cNvPr id="15" name="Table 0"/>
+          <p:cNvGraphicFramePr>
+            <a:graphicFrameLocks noGrp="1"/>
+          </p:cNvGraphicFramePr>
+          <p:nvPr>
+            <p:extLst>
+              <p:ext uri="{D42A27DB-BD31-4B8C-83A1-F6EECF244321}">
+                <p14:modId xmlns:p14="http://schemas.microsoft.com/office/powerpoint/2010/main" val="1579011935"/>
+              </p:ext>
+            </p:extLst>
+          </p:nvPr>
+        </p:nvGraphicFramePr>
+        <p:xfrm>
+          <a:off x="640080" y="2743200"/>
+          <a:ext cx="4709160" cy="914400"/>
+        </p:xfrm>
+        <a:graphic>
+          <a:graphicData uri="http://schemas.openxmlformats.org/drawingml/2006/table">
+            <a:tbl>
+              <a:tblPr/>
+              <a:tblGrid>
+                <a:gridCol w="731520"/>
+                <a:gridCol w="1234440"/>
+                <a:gridCol w="1051560"/>
+                <a:gridCol w="1691640"/>
+              </a:tblGrid>
+              <a:tr h="274320">
+                <a:tc>
+                  <a:txBody>
+                    <a:bodyPr/>
+                    <a:lstStyle/>
+                    <a:p>
+                      <a:pPr algn="ctr" indent="0" marL="0">
+                        <a:buNone/>
+                      </a:pPr>
+                      <a:r>
+                        <a:rPr lang="en-US" sz="950" b="1" dirty="0">
+                          <a:solidFill>
+                            <a:srgbClr val="FFFFFF"/>
+                          </a:solidFill>
+                          <a:latin typeface="Malgun Gothic" pitchFamily="34" charset="0"/>
+                          <a:ea typeface="Malgun Gothic" pitchFamily="34" charset="-122"/>
+                          <a:cs typeface="Malgun Gothic" pitchFamily="34" charset="-120"/>
+                        </a:rPr>
+                        <a:t>구분</a:t>
+                      </a:r>
+                      <a:endParaRPr lang="en-US" sz="950" dirty="0">
+                        <a:latin typeface="Malgun Gothic" charset="0"/>
+                        <a:ea typeface="Malgun Gothic" charset="0"/>
+                        <a:cs typeface="Malgun Gothic" charset="0"/>
+                      </a:endParaRPr>
+                    </a:p>
+                  </a:txBody>
+                  <a:tcPr marL="91440" marR="91440" marT="45720" marB="45720" anchor="ctr">
+                    <a:lnL w="9525" cap="flat" cmpd="sng" algn="ctr">
+                      <a:solidFill>
+                        <a:srgbClr val="C9D6E2"/>
+                      </a:solidFill>
+                      <a:prstDash val="solid"/>
+                      <a:round/>
+                      <a:headEnd type="none" w="med" len="med"/>
+                      <a:tailEnd type="none" w="med" len="med"/>
+                    </a:lnL>
+                    <a:lnR w="9525" cap="flat" cmpd="sng" algn="ctr">
+                      <a:solidFill>
+                        <a:srgbClr val="C9D6E2"/>
+                      </a:solidFill>
+                      <a:prstDash val="solid"/>
+                      <a:round/>
+                      <a:headEnd type="none" w="med" len="med"/>
+                      <a:tailEnd type="none" w="med" len="med"/>
+                    </a:lnR>
+                    <a:lnT w="9525" cap="flat" cmpd="sng" algn="ctr">
+                      <a:solidFill>
+                        <a:srgbClr val="C9D6E2"/>
+                      </a:solidFill>
+                      <a:prstDash val="solid"/>
+                      <a:round/>
+                      <a:headEnd type="none" w="med" len="med"/>
+                      <a:tailEnd type="none" w="med" len="med"/>
+                    </a:lnT>
+                    <a:lnB w="9525" cap="flat" cmpd="sng" algn="ctr">
+                      <a:solidFill>
+                        <a:srgbClr val="C9D6E2"/>
+                      </a:solidFill>
+                      <a:prstDash val="solid"/>
+                      <a:round/>
+                      <a:headEnd type="none" w="med" len="med"/>
+                      <a:tailEnd type="none" w="med" len="med"/>
+                    </a:lnB>
+                    <a:solidFill>
+                      <a:srgbClr val="1D70A2"/>
+                    </a:solidFill>
+                  </a:tcPr>
+                </a:tc>
+                <a:tc>
+                  <a:txBody>
+                    <a:bodyPr/>
+                    <a:lstStyle/>
+                    <a:p>
+                      <a:pPr algn="ctr" indent="0" marL="0">
+                        <a:buNone/>
+                      </a:pPr>
+                      <a:r>
+                        <a:rPr lang="en-US" sz="950" b="1" dirty="0">
+                          <a:solidFill>
+                            <a:srgbClr val="FFFFFF"/>
+                          </a:solidFill>
+                          <a:latin typeface="Malgun Gothic" pitchFamily="34" charset="0"/>
+                          <a:ea typeface="Malgun Gothic" pitchFamily="34" charset="-122"/>
+                          <a:cs typeface="Malgun Gothic" pitchFamily="34" charset="-120"/>
+                        </a:rPr>
+                        <a:t>의무보험명</a:t>
+                      </a:r>
+                      <a:endParaRPr lang="en-US" sz="950" dirty="0">
+                        <a:latin typeface="Malgun Gothic" charset="0"/>
+                        <a:ea typeface="Malgun Gothic" charset="0"/>
+                        <a:cs typeface="Malgun Gothic" charset="0"/>
+                      </a:endParaRPr>
+                    </a:p>
+                  </a:txBody>
+                  <a:tcPr marL="91440" marR="91440" marT="45720" marB="45720" anchor="ctr">
+                    <a:lnL w="9525" cap="flat" cmpd="sng" algn="ctr">
+                      <a:solidFill>
+                        <a:srgbClr val="C9D6E2"/>
+                      </a:solidFill>
+                      <a:prstDash val="solid"/>
+                      <a:round/>
+                      <a:headEnd type="none" w="med" len="med"/>
+                      <a:tailEnd type="none" w="med" len="med"/>
+                    </a:lnL>
+                    <a:lnR w="9525" cap="flat" cmpd="sng" algn="ctr">
+                      <a:solidFill>
+                        <a:srgbClr val="C9D6E2"/>
+                      </a:solidFill>
+                      <a:prstDash val="solid"/>
+                      <a:round/>
+                      <a:headEnd type="none" w="med" len="med"/>
+                      <a:tailEnd type="none" w="med" len="med"/>
+                    </a:lnR>
+                    <a:lnT w="9525" cap="flat" cmpd="sng" algn="ctr">
+                      <a:solidFill>
+                        <a:srgbClr val="C9D6E2"/>
+                      </a:solidFill>
+                      <a:prstDash val="solid"/>
+                      <a:round/>
+                      <a:headEnd type="none" w="med" len="med"/>
+                      <a:tailEnd type="none" w="med" len="med"/>
+                    </a:lnT>
+                    <a:lnB w="9525" cap="flat" cmpd="sng" algn="ctr">
+                      <a:solidFill>
+                        <a:srgbClr val="C9D6E2"/>
+                      </a:solidFill>
+                      <a:prstDash val="solid"/>
+                      <a:round/>
+                      <a:headEnd type="none" w="med" len="med"/>
+                      <a:tailEnd type="none" w="med" len="med"/>
+                    </a:lnB>
+                    <a:solidFill>
+                      <a:srgbClr val="1D70A2"/>
+                    </a:solidFill>
+                  </a:tcPr>
+                </a:tc>
+                <a:tc>
+                  <a:txBody>
+                    <a:bodyPr/>
+                    <a:lstStyle/>
+                    <a:p>
+                      <a:pPr algn="ctr" indent="0" marL="0">
+                        <a:buNone/>
+                      </a:pPr>
+                      <a:r>
+                        <a:rPr lang="en-US" sz="950" b="1" dirty="0">
+                          <a:solidFill>
+                            <a:srgbClr val="FFFFFF"/>
+                          </a:solidFill>
+                          <a:latin typeface="Malgun Gothic" pitchFamily="34" charset="0"/>
+                          <a:ea typeface="Malgun Gothic" pitchFamily="34" charset="-122"/>
+                          <a:cs typeface="Malgun Gothic" pitchFamily="34" charset="-120"/>
+                        </a:rPr>
+                        <a:t>관련법령</a:t>
+                      </a:r>
+                      <a:endParaRPr lang="en-US" sz="950" dirty="0">
+                        <a:latin typeface="Malgun Gothic" charset="0"/>
+                        <a:ea typeface="Malgun Gothic" charset="0"/>
+                        <a:cs typeface="Malgun Gothic" charset="0"/>
+                      </a:endParaRPr>
+                    </a:p>
+                  </a:txBody>
+                  <a:tcPr marL="91440" marR="91440" marT="45720" marB="45720" anchor="ctr">
+                    <a:lnL w="9525" cap="flat" cmpd="sng" algn="ctr">
+                      <a:solidFill>
+                        <a:srgbClr val="C9D6E2"/>
+                      </a:solidFill>
+                      <a:prstDash val="solid"/>
+                      <a:round/>
+                      <a:headEnd type="none" w="med" len="med"/>
+                      <a:tailEnd type="none" w="med" len="med"/>
+                    </a:lnL>
+                    <a:lnR w="9525" cap="flat" cmpd="sng" algn="ctr">
+                      <a:solidFill>
+                        <a:srgbClr val="C9D6E2"/>
+                      </a:solidFill>
+                      <a:prstDash val="solid"/>
+                      <a:round/>
+                      <a:headEnd type="none" w="med" len="med"/>
+                      <a:tailEnd type="none" w="med" len="med"/>
+                    </a:lnR>
+                    <a:lnT w="9525" cap="flat" cmpd="sng" algn="ctr">
+                      <a:solidFill>
+                        <a:srgbClr val="C9D6E2"/>
+                      </a:solidFill>
+                      <a:prstDash val="solid"/>
+                      <a:round/>
+                      <a:headEnd type="none" w="med" len="med"/>
+                      <a:tailEnd type="none" w="med" len="med"/>
+                    </a:lnT>
+                    <a:lnB w="9525" cap="flat" cmpd="sng" algn="ctr">
+                      <a:solidFill>
+                        <a:srgbClr val="C9D6E2"/>
+                      </a:solidFill>
+                      <a:prstDash val="solid"/>
+                      <a:round/>
+                      <a:headEnd type="none" w="med" len="med"/>
+                      <a:tailEnd type="none" w="med" len="med"/>
+                    </a:lnB>
+                    <a:solidFill>
+                      <a:srgbClr val="1D70A2"/>
+                    </a:solidFill>
+                  </a:tcPr>
+                </a:tc>
+                <a:tc>
+                  <a:txBody>
+                    <a:bodyPr/>
+                    <a:lstStyle/>
+                    <a:p>
+                      <a:pPr algn="ctr" indent="0" marL="0">
+                        <a:buNone/>
+                      </a:pPr>
+                      <a:r>
+                        <a:rPr lang="en-US" sz="950" b="1" dirty="0">
+                          <a:solidFill>
+                            <a:srgbClr val="FFFFFF"/>
+                          </a:solidFill>
+                          <a:latin typeface="Malgun Gothic" pitchFamily="34" charset="0"/>
+                          <a:ea typeface="Malgun Gothic" pitchFamily="34" charset="-122"/>
+                          <a:cs typeface="Malgun Gothic" pitchFamily="34" charset="-120"/>
+                        </a:rPr>
+                        <a:t>가입 대상</a:t>
+                      </a:r>
+                      <a:endParaRPr lang="en-US" sz="950" dirty="0">
+                        <a:latin typeface="Malgun Gothic" charset="0"/>
+                        <a:ea typeface="Malgun Gothic" charset="0"/>
+                        <a:cs typeface="Malgun Gothic" charset="0"/>
+                      </a:endParaRPr>
+                    </a:p>
+                  </a:txBody>
+                  <a:tcPr marL="91440" marR="91440" marT="45720" marB="45720" anchor="ctr">
+                    <a:lnL w="9525" cap="flat" cmpd="sng" algn="ctr">
+                      <a:solidFill>
+                        <a:srgbClr val="C9D6E2"/>
+                      </a:solidFill>
+                      <a:prstDash val="solid"/>
+                      <a:round/>
+                      <a:headEnd type="none" w="med" len="med"/>
+                      <a:tailEnd type="none" w="med" len="med"/>
+                    </a:lnL>
+                    <a:lnR w="9525" cap="flat" cmpd="sng" algn="ctr">
+                      <a:solidFill>
+                        <a:srgbClr val="C9D6E2"/>
+                      </a:solidFill>
+                      <a:prstDash val="solid"/>
+                      <a:round/>
+                      <a:headEnd type="none" w="med" len="med"/>
+                      <a:tailEnd type="none" w="med" len="med"/>
+                    </a:lnR>
+                    <a:lnT w="9525" cap="flat" cmpd="sng" algn="ctr">
+                      <a:solidFill>
+                        <a:srgbClr val="C9D6E2"/>
+                      </a:solidFill>
+                      <a:prstDash val="solid"/>
+                      <a:round/>
+                      <a:headEnd type="none" w="med" len="med"/>
+                      <a:tailEnd type="none" w="med" len="med"/>
+                    </a:lnT>
+                    <a:lnB w="9525" cap="flat" cmpd="sng" algn="ctr">
+                      <a:solidFill>
+                        <a:srgbClr val="C9D6E2"/>
+                      </a:solidFill>
+                      <a:prstDash val="solid"/>
+                      <a:round/>
+                      <a:headEnd type="none" w="med" len="med"/>
+                      <a:tailEnd type="none" w="med" len="med"/>
+                    </a:lnB>
+                    <a:solidFill>
+                      <a:srgbClr val="1D70A2"/>
+                    </a:solidFill>
+                  </a:tcPr>
+                </a:tc>
+              </a:tr>
+              <a:tr h="502920">
+                <a:tc>
+                  <a:txBody>
+                    <a:bodyPr/>
+                    <a:lstStyle/>
+                    <a:p>
+                      <a:pPr algn="ctr" indent="0" marL="0">
+                        <a:buNone/>
+                      </a:pPr>
+                      <a:r>
+                        <a:rPr lang="en-US" sz="950" dirty="0">
+                          <a:solidFill>
+                            <a:srgbClr val="1F2933"/>
+                          </a:solidFill>
+                          <a:latin typeface="Malgun Gothic" pitchFamily="34" charset="0"/>
+                          <a:ea typeface="Malgun Gothic" pitchFamily="34" charset="-122"/>
+                          <a:cs typeface="Malgun Gothic" pitchFamily="34" charset="-120"/>
+                        </a:rPr>
+                        <a:t>생활체육</a:t>
+                      </a:r>
+                      <a:endParaRPr lang="en-US" sz="950" dirty="0">
+                        <a:latin typeface="Malgun Gothic" charset="0"/>
+                        <a:ea typeface="Malgun Gothic" charset="0"/>
+                        <a:cs typeface="Malgun Gothic" charset="0"/>
+                      </a:endParaRPr>
+                    </a:p>
+                  </a:txBody>
+                  <a:tcPr marL="91440" marR="91440" marT="45720" marB="45720" anchor="ctr">
+                    <a:lnL w="9525" cap="flat" cmpd="sng" algn="ctr">
+                      <a:solidFill>
+                        <a:srgbClr val="C9D6E2"/>
+                      </a:solidFill>
+                      <a:prstDash val="solid"/>
+                      <a:round/>
+                      <a:headEnd type="none" w="med" len="med"/>
+                      <a:tailEnd type="none" w="med" len="med"/>
+                    </a:lnL>
+                    <a:lnR w="9525" cap="flat" cmpd="sng" algn="ctr">
+                      <a:solidFill>
+                        <a:srgbClr val="C9D6E2"/>
+                      </a:solidFill>
+                      <a:prstDash val="solid"/>
+                      <a:round/>
+                      <a:headEnd type="none" w="med" len="med"/>
+                      <a:tailEnd type="none" w="med" len="med"/>
+                    </a:lnR>
+                    <a:lnT w="9525" cap="flat" cmpd="sng" algn="ctr">
+                      <a:solidFill>
+                        <a:srgbClr val="C9D6E2"/>
+                      </a:solidFill>
+                      <a:prstDash val="solid"/>
+                      <a:round/>
+                      <a:headEnd type="none" w="med" len="med"/>
+                      <a:tailEnd type="none" w="med" len="med"/>
+                    </a:lnT>
+                    <a:lnB w="9525" cap="flat" cmpd="sng" algn="ctr">
+                      <a:solidFill>
+                        <a:srgbClr val="C9D6E2"/>
+                      </a:solidFill>
+                      <a:prstDash val="solid"/>
+                      <a:round/>
+                      <a:headEnd type="none" w="med" len="med"/>
+                      <a:tailEnd type="none" w="med" len="med"/>
+                    </a:lnB>
+                  </a:tcPr>
+                </a:tc>
+                <a:tc>
+                  <a:txBody>
+                    <a:bodyPr/>
+                    <a:lstStyle/>
+                    <a:p>
+                      <a:pPr algn="ctr" indent="0" marL="0">
+                        <a:buNone/>
+                      </a:pPr>
+                      <a:r>
+                        <a:rPr lang="en-US" sz="950" dirty="0">
+                          <a:solidFill>
+                            <a:srgbClr val="1F2933"/>
+                          </a:solidFill>
+                          <a:latin typeface="Malgun Gothic" pitchFamily="34" charset="0"/>
+                          <a:ea typeface="Malgun Gothic" pitchFamily="34" charset="-122"/>
+                          <a:cs typeface="Malgun Gothic" pitchFamily="34" charset="-120"/>
+                        </a:rPr>
+                        <a:t>생활체육안전보험</a:t>
+                      </a:r>
+                      <a:endParaRPr lang="en-US" sz="950" dirty="0">
+                        <a:latin typeface="Malgun Gothic" charset="0"/>
+                        <a:ea typeface="Malgun Gothic" charset="0"/>
+                        <a:cs typeface="Malgun Gothic" charset="0"/>
+                      </a:endParaRPr>
+                    </a:p>
+                  </a:txBody>
+                  <a:tcPr marL="91440" marR="91440" marT="45720" marB="45720" anchor="ctr">
+                    <a:lnL w="9525" cap="flat" cmpd="sng" algn="ctr">
+                      <a:solidFill>
+                        <a:srgbClr val="C9D6E2"/>
+                      </a:solidFill>
+                      <a:prstDash val="solid"/>
+                      <a:round/>
+                      <a:headEnd type="none" w="med" len="med"/>
+                      <a:tailEnd type="none" w="med" len="med"/>
+                    </a:lnL>
+                    <a:lnR w="9525" cap="flat" cmpd="sng" algn="ctr">
+                      <a:solidFill>
+                        <a:srgbClr val="C9D6E2"/>
+                      </a:solidFill>
+                      <a:prstDash val="solid"/>
+                      <a:round/>
+                      <a:headEnd type="none" w="med" len="med"/>
+                      <a:tailEnd type="none" w="med" len="med"/>
+                    </a:lnR>
+                    <a:lnT w="9525" cap="flat" cmpd="sng" algn="ctr">
+                      <a:solidFill>
+                        <a:srgbClr val="C9D6E2"/>
+                      </a:solidFill>
+                      <a:prstDash val="solid"/>
+                      <a:round/>
+                      <a:headEnd type="none" w="med" len="med"/>
+                      <a:tailEnd type="none" w="med" len="med"/>
+                    </a:lnT>
+                    <a:lnB w="9525" cap="flat" cmpd="sng" algn="ctr">
+                      <a:solidFill>
+                        <a:srgbClr val="C9D6E2"/>
+                      </a:solidFill>
+                      <a:prstDash val="solid"/>
+                      <a:round/>
+                      <a:headEnd type="none" w="med" len="med"/>
+                      <a:tailEnd type="none" w="med" len="med"/>
+                    </a:lnB>
+                  </a:tcPr>
+                </a:tc>
+                <a:tc>
+                  <a:txBody>
+                    <a:bodyPr/>
+                    <a:lstStyle/>
+                    <a:p>
+                      <a:pPr algn="ctr" indent="0" marL="0">
+                        <a:buNone/>
+                      </a:pPr>
+                      <a:r>
+                        <a:rPr lang="en-US" sz="950" dirty="0">
+                          <a:solidFill>
+                            <a:srgbClr val="1F2933"/>
+                          </a:solidFill>
+                          <a:latin typeface="Malgun Gothic" pitchFamily="34" charset="0"/>
+                          <a:ea typeface="Malgun Gothic" pitchFamily="34" charset="-122"/>
+                          <a:cs typeface="Malgun Gothic" pitchFamily="34" charset="-120"/>
+                        </a:rPr>
+                        <a:t>생활체육진흥법</a:t>
+                      </a:r>
+                      <a:endParaRPr lang="en-US" sz="950" dirty="0">
+                        <a:latin typeface="Malgun Gothic" charset="0"/>
+                        <a:ea typeface="Malgun Gothic" charset="0"/>
+                        <a:cs typeface="Malgun Gothic" charset="0"/>
+                      </a:endParaRPr>
+                    </a:p>
+                    <a:p>
+                      <a:pPr algn="ctr" indent="0" marL="0">
+                        <a:buNone/>
+                      </a:pPr>
+                      <a:r>
+                        <a:rPr lang="en-US" sz="950" dirty="0">
+                          <a:solidFill>
+                            <a:srgbClr val="1F2933"/>
+                          </a:solidFill>
+                          <a:latin typeface="Malgun Gothic" pitchFamily="34" charset="0"/>
+                          <a:ea typeface="Malgun Gothic" pitchFamily="34" charset="-122"/>
+                          <a:cs typeface="Malgun Gothic" pitchFamily="34" charset="-120"/>
+                        </a:rPr>
+                        <a:t>제12조</a:t>
+                      </a:r>
+                      <a:endParaRPr lang="en-US" sz="950" dirty="0">
+                        <a:latin typeface="Malgun Gothic" charset="0"/>
+                        <a:ea typeface="Malgun Gothic" charset="0"/>
+                        <a:cs typeface="Malgun Gothic" charset="0"/>
+                      </a:endParaRPr>
+                    </a:p>
+                  </a:txBody>
+                  <a:tcPr marL="91440" marR="91440" marT="45720" marB="45720" anchor="ctr">
+                    <a:lnL w="9525" cap="flat" cmpd="sng" algn="ctr">
+                      <a:solidFill>
+                        <a:srgbClr val="C9D6E2"/>
+                      </a:solidFill>
+                      <a:prstDash val="solid"/>
+                      <a:round/>
+                      <a:headEnd type="none" w="med" len="med"/>
+                      <a:tailEnd type="none" w="med" len="med"/>
+                    </a:lnL>
+                    <a:lnR w="9525" cap="flat" cmpd="sng" algn="ctr">
+                      <a:solidFill>
+                        <a:srgbClr val="C9D6E2"/>
+                      </a:solidFill>
+                      <a:prstDash val="solid"/>
+                      <a:round/>
+                      <a:headEnd type="none" w="med" len="med"/>
+                      <a:tailEnd type="none" w="med" len="med"/>
+                    </a:lnR>
+                    <a:lnT w="9525" cap="flat" cmpd="sng" algn="ctr">
+                      <a:solidFill>
+                        <a:srgbClr val="C9D6E2"/>
+                      </a:solidFill>
+                      <a:prstDash val="solid"/>
+                      <a:round/>
+                      <a:headEnd type="none" w="med" len="med"/>
+                      <a:tailEnd type="none" w="med" len="med"/>
+                    </a:lnT>
+                    <a:lnB w="9525" cap="flat" cmpd="sng" algn="ctr">
+                      <a:solidFill>
+                        <a:srgbClr val="C9D6E2"/>
+                      </a:solidFill>
+                      <a:prstDash val="solid"/>
+                      <a:round/>
+                      <a:headEnd type="none" w="med" len="med"/>
+                      <a:tailEnd type="none" w="med" len="med"/>
+                    </a:lnB>
+                  </a:tcPr>
+                </a:tc>
+                <a:tc>
+                  <a:txBody>
+                    <a:bodyPr/>
+                    <a:lstStyle/>
+                    <a:p>
+                      <a:pPr algn="ctr" indent="0" marL="0">
+                        <a:buNone/>
+                      </a:pPr>
+                      <a:r>
+                        <a:rPr lang="en-US" sz="950" dirty="0">
+                          <a:solidFill>
+                            <a:srgbClr val="1F2933"/>
+                          </a:solidFill>
+                          <a:latin typeface="Malgun Gothic" pitchFamily="34" charset="0"/>
+                          <a:ea typeface="Malgun Gothic" pitchFamily="34" charset="-122"/>
+                          <a:cs typeface="Malgun Gothic" pitchFamily="34" charset="-120"/>
+                        </a:rPr>
+                        <a:t>생활체육 대회를 개최하거나 강습을 하려는 생활체육단체 등</a:t>
+                      </a:r>
+                      <a:endParaRPr lang="en-US" sz="950" dirty="0">
+                        <a:latin typeface="Malgun Gothic" charset="0"/>
+                        <a:ea typeface="Malgun Gothic" charset="0"/>
+                        <a:cs typeface="Malgun Gothic" charset="0"/>
+                      </a:endParaRPr>
+                    </a:p>
+                  </a:txBody>
+                  <a:tcPr marL="91440" marR="91440" marT="45720" marB="45720" anchor="ctr">
+                    <a:lnL w="9525" cap="flat" cmpd="sng" algn="ctr">
+                      <a:solidFill>
+                        <a:srgbClr val="C9D6E2"/>
+                      </a:solidFill>
+                      <a:prstDash val="solid"/>
+                      <a:round/>
+                      <a:headEnd type="none" w="med" len="med"/>
+                      <a:tailEnd type="none" w="med" len="med"/>
+                    </a:lnL>
+                    <a:lnR w="9525" cap="flat" cmpd="sng" algn="ctr">
+                      <a:solidFill>
+                        <a:srgbClr val="C9D6E2"/>
+                      </a:solidFill>
+                      <a:prstDash val="solid"/>
+                      <a:round/>
+                      <a:headEnd type="none" w="med" len="med"/>
+                      <a:tailEnd type="none" w="med" len="med"/>
+                    </a:lnR>
+                    <a:lnT w="9525" cap="flat" cmpd="sng" algn="ctr">
+                      <a:solidFill>
+                        <a:srgbClr val="C9D6E2"/>
+                      </a:solidFill>
+                      <a:prstDash val="solid"/>
+                      <a:round/>
+                      <a:headEnd type="none" w="med" len="med"/>
+                      <a:tailEnd type="none" w="med" len="med"/>
+                    </a:lnT>
+                    <a:lnB w="9525" cap="flat" cmpd="sng" algn="ctr">
+                      <a:solidFill>
+                        <a:srgbClr val="C9D6E2"/>
+                      </a:solidFill>
+                      <a:prstDash val="solid"/>
+                      <a:round/>
+                      <a:headEnd type="none" w="med" len="med"/>
+                      <a:tailEnd type="none" w="med" len="med"/>
+                    </a:lnB>
+                  </a:tcPr>
+                </a:tc>
+              </a:tr>
+              <a:tr h="566928">
+                <a:tc>
+                  <a:txBody>
+                    <a:bodyPr/>
+                    <a:lstStyle/>
+                    <a:p>
+                      <a:pPr algn="ctr" indent="0" marL="0">
+                        <a:buNone/>
+                      </a:pPr>
+                      <a:r>
+                        <a:rPr lang="en-US" sz="950" dirty="0">
+                          <a:solidFill>
+                            <a:srgbClr val="1F2933"/>
+                          </a:solidFill>
+                          <a:latin typeface="Malgun Gothic" pitchFamily="34" charset="0"/>
+                          <a:ea typeface="Malgun Gothic" pitchFamily="34" charset="-122"/>
+                          <a:cs typeface="Malgun Gothic" pitchFamily="34" charset="-120"/>
+                        </a:rPr>
+                        <a:t>전문체육</a:t>
+                      </a:r>
+                      <a:endParaRPr lang="en-US" sz="950" dirty="0">
+                        <a:latin typeface="Malgun Gothic" charset="0"/>
+                        <a:ea typeface="Malgun Gothic" charset="0"/>
+                        <a:cs typeface="Malgun Gothic" charset="0"/>
+                      </a:endParaRPr>
+                    </a:p>
+                  </a:txBody>
+                  <a:tcPr marL="91440" marR="91440" marT="45720" marB="45720" anchor="ctr">
+                    <a:lnL w="9525" cap="flat" cmpd="sng" algn="ctr">
+                      <a:solidFill>
+                        <a:srgbClr val="C9D6E2"/>
+                      </a:solidFill>
+                      <a:prstDash val="solid"/>
+                      <a:round/>
+                      <a:headEnd type="none" w="med" len="med"/>
+                      <a:tailEnd type="none" w="med" len="med"/>
+                    </a:lnL>
+                    <a:lnR w="9525" cap="flat" cmpd="sng" algn="ctr">
+                      <a:solidFill>
+                        <a:srgbClr val="C9D6E2"/>
+                      </a:solidFill>
+                      <a:prstDash val="solid"/>
+                      <a:round/>
+                      <a:headEnd type="none" w="med" len="med"/>
+                      <a:tailEnd type="none" w="med" len="med"/>
+                    </a:lnR>
+                    <a:lnT w="9525" cap="flat" cmpd="sng" algn="ctr">
+                      <a:solidFill>
+                        <a:srgbClr val="C9D6E2"/>
+                      </a:solidFill>
+                      <a:prstDash val="solid"/>
+                      <a:round/>
+                      <a:headEnd type="none" w="med" len="med"/>
+                      <a:tailEnd type="none" w="med" len="med"/>
+                    </a:lnT>
+                    <a:lnB w="9525" cap="flat" cmpd="sng" algn="ctr">
+                      <a:solidFill>
+                        <a:srgbClr val="C9D6E2"/>
+                      </a:solidFill>
+                      <a:prstDash val="solid"/>
+                      <a:round/>
+                      <a:headEnd type="none" w="med" len="med"/>
+                      <a:tailEnd type="none" w="med" len="med"/>
+                    </a:lnB>
+                  </a:tcPr>
+                </a:tc>
+                <a:tc>
+                  <a:txBody>
+                    <a:bodyPr/>
+                    <a:lstStyle/>
+                    <a:p>
+                      <a:pPr algn="ctr" indent="0" marL="0">
+                        <a:buNone/>
+                      </a:pPr>
+                      <a:r>
+                        <a:rPr lang="en-US" sz="950" dirty="0">
+                          <a:solidFill>
+                            <a:srgbClr val="1F2933"/>
+                          </a:solidFill>
+                          <a:latin typeface="Malgun Gothic" pitchFamily="34" charset="0"/>
+                          <a:ea typeface="Malgun Gothic" pitchFamily="34" charset="-122"/>
+                          <a:cs typeface="Malgun Gothic" pitchFamily="34" charset="-120"/>
+                        </a:rPr>
+                        <a:t>운동경기대회</a:t>
+                      </a:r>
+                      <a:endParaRPr lang="en-US" sz="950" dirty="0">
+                        <a:latin typeface="Malgun Gothic" charset="0"/>
+                        <a:ea typeface="Malgun Gothic" charset="0"/>
+                        <a:cs typeface="Malgun Gothic" charset="0"/>
+                      </a:endParaRPr>
+                    </a:p>
+                    <a:p>
+                      <a:pPr algn="ctr" indent="0" marL="0">
+                        <a:buNone/>
+                      </a:pPr>
+                      <a:r>
+                        <a:rPr lang="en-US" sz="950" dirty="0">
+                          <a:solidFill>
+                            <a:srgbClr val="1F2933"/>
+                          </a:solidFill>
+                          <a:latin typeface="Malgun Gothic" pitchFamily="34" charset="0"/>
+                          <a:ea typeface="Malgun Gothic" pitchFamily="34" charset="-122"/>
+                          <a:cs typeface="Malgun Gothic" pitchFamily="34" charset="-120"/>
+                        </a:rPr>
+                        <a:t>배상책임보험</a:t>
+                      </a:r>
+                      <a:endParaRPr lang="en-US" sz="950" dirty="0">
+                        <a:latin typeface="Malgun Gothic" charset="0"/>
+                        <a:ea typeface="Malgun Gothic" charset="0"/>
+                        <a:cs typeface="Malgun Gothic" charset="0"/>
+                      </a:endParaRPr>
+                    </a:p>
+                  </a:txBody>
+                  <a:tcPr marL="91440" marR="91440" marT="45720" marB="45720" anchor="ctr">
+                    <a:lnL w="9525" cap="flat" cmpd="sng" algn="ctr">
+                      <a:solidFill>
+                        <a:srgbClr val="C9D6E2"/>
+                      </a:solidFill>
+                      <a:prstDash val="solid"/>
+                      <a:round/>
+                      <a:headEnd type="none" w="med" len="med"/>
+                      <a:tailEnd type="none" w="med" len="med"/>
+                    </a:lnL>
+                    <a:lnR w="9525" cap="flat" cmpd="sng" algn="ctr">
+                      <a:solidFill>
+                        <a:srgbClr val="C9D6E2"/>
+                      </a:solidFill>
+                      <a:prstDash val="solid"/>
+                      <a:round/>
+                      <a:headEnd type="none" w="med" len="med"/>
+                      <a:tailEnd type="none" w="med" len="med"/>
+                    </a:lnR>
+                    <a:lnT w="9525" cap="flat" cmpd="sng" algn="ctr">
+                      <a:solidFill>
+                        <a:srgbClr val="C9D6E2"/>
+                      </a:solidFill>
+                      <a:prstDash val="solid"/>
+                      <a:round/>
+                      <a:headEnd type="none" w="med" len="med"/>
+                      <a:tailEnd type="none" w="med" len="med"/>
+                    </a:lnT>
+                    <a:lnB w="9525" cap="flat" cmpd="sng" algn="ctr">
+                      <a:solidFill>
+                        <a:srgbClr val="C9D6E2"/>
+                      </a:solidFill>
+                      <a:prstDash val="solid"/>
+                      <a:round/>
+                      <a:headEnd type="none" w="med" len="med"/>
+                      <a:tailEnd type="none" w="med" len="med"/>
+                    </a:lnB>
+                  </a:tcPr>
+                </a:tc>
+                <a:tc>
+                  <a:txBody>
+                    <a:bodyPr/>
+                    <a:lstStyle/>
+                    <a:p>
+                      <a:pPr algn="ctr" indent="0" marL="0">
+                        <a:buNone/>
+                      </a:pPr>
+                      <a:r>
+                        <a:rPr lang="en-US" sz="950" dirty="0">
+                          <a:solidFill>
+                            <a:srgbClr val="1F2933"/>
+                          </a:solidFill>
+                          <a:latin typeface="Malgun Gothic" pitchFamily="34" charset="0"/>
+                          <a:ea typeface="Malgun Gothic" pitchFamily="34" charset="-122"/>
+                          <a:cs typeface="Malgun Gothic" pitchFamily="34" charset="-120"/>
+                        </a:rPr>
+                        <a:t>체육인복지법</a:t>
+                      </a:r>
+                      <a:endParaRPr lang="en-US" sz="950" dirty="0">
+                        <a:latin typeface="Malgun Gothic" charset="0"/>
+                        <a:ea typeface="Malgun Gothic" charset="0"/>
+                        <a:cs typeface="Malgun Gothic" charset="0"/>
+                      </a:endParaRPr>
+                    </a:p>
+                    <a:p>
+                      <a:pPr algn="ctr" indent="0" marL="0">
+                        <a:buNone/>
+                      </a:pPr>
+                      <a:r>
+                        <a:rPr lang="en-US" sz="950" dirty="0">
+                          <a:solidFill>
+                            <a:srgbClr val="1F2933"/>
+                          </a:solidFill>
+                          <a:latin typeface="Malgun Gothic" pitchFamily="34" charset="0"/>
+                          <a:ea typeface="Malgun Gothic" pitchFamily="34" charset="-122"/>
+                          <a:cs typeface="Malgun Gothic" pitchFamily="34" charset="-120"/>
+                        </a:rPr>
+                        <a:t>제9조</a:t>
+                      </a:r>
+                      <a:endParaRPr lang="en-US" sz="950" dirty="0">
+                        <a:latin typeface="Malgun Gothic" charset="0"/>
+                        <a:ea typeface="Malgun Gothic" charset="0"/>
+                        <a:cs typeface="Malgun Gothic" charset="0"/>
+                      </a:endParaRPr>
+                    </a:p>
+                  </a:txBody>
+                  <a:tcPr marL="91440" marR="91440" marT="45720" marB="45720" anchor="ctr">
+                    <a:lnL w="9525" cap="flat" cmpd="sng" algn="ctr">
+                      <a:solidFill>
+                        <a:srgbClr val="C9D6E2"/>
+                      </a:solidFill>
+                      <a:prstDash val="solid"/>
+                      <a:round/>
+                      <a:headEnd type="none" w="med" len="med"/>
+                      <a:tailEnd type="none" w="med" len="med"/>
+                    </a:lnL>
+                    <a:lnR w="9525" cap="flat" cmpd="sng" algn="ctr">
+                      <a:solidFill>
+                        <a:srgbClr val="C9D6E2"/>
+                      </a:solidFill>
+                      <a:prstDash val="solid"/>
+                      <a:round/>
+                      <a:headEnd type="none" w="med" len="med"/>
+                      <a:tailEnd type="none" w="med" len="med"/>
+                    </a:lnR>
+                    <a:lnT w="9525" cap="flat" cmpd="sng" algn="ctr">
+                      <a:solidFill>
+                        <a:srgbClr val="C9D6E2"/>
+                      </a:solidFill>
+                      <a:prstDash val="solid"/>
+                      <a:round/>
+                      <a:headEnd type="none" w="med" len="med"/>
+                      <a:tailEnd type="none" w="med" len="med"/>
+                    </a:lnT>
+                    <a:lnB w="9525" cap="flat" cmpd="sng" algn="ctr">
+                      <a:solidFill>
+                        <a:srgbClr val="C9D6E2"/>
+                      </a:solidFill>
+                      <a:prstDash val="solid"/>
+                      <a:round/>
+                      <a:headEnd type="none" w="med" len="med"/>
+                      <a:tailEnd type="none" w="med" len="med"/>
+                    </a:lnB>
+                  </a:tcPr>
+                </a:tc>
+                <a:tc>
+                  <a:txBody>
+                    <a:bodyPr/>
+                    <a:lstStyle/>
+                    <a:p>
+                      <a:pPr algn="ctr" indent="0" marL="0">
+                        <a:buNone/>
+                      </a:pPr>
+                      <a:r>
+                        <a:rPr lang="en-US" sz="950" dirty="0">
+                          <a:solidFill>
+                            <a:srgbClr val="1F2933"/>
+                          </a:solidFill>
+                          <a:latin typeface="Malgun Gothic" pitchFamily="34" charset="0"/>
+                          <a:ea typeface="Malgun Gothic" pitchFamily="34" charset="-122"/>
+                          <a:cs typeface="Malgun Gothic" pitchFamily="34" charset="-120"/>
+                        </a:rPr>
+                        <a:t>대통령령으로 정하는 운동경기 대회*를 개최·운영하는 자</a:t>
+                      </a:r>
+                      <a:endParaRPr lang="en-US" sz="950" dirty="0">
+                        <a:latin typeface="Malgun Gothic" charset="0"/>
+                        <a:ea typeface="Malgun Gothic" charset="0"/>
+                        <a:cs typeface="Malgun Gothic" charset="0"/>
+                      </a:endParaRPr>
+                    </a:p>
+                  </a:txBody>
+                  <a:tcPr marL="91440" marR="91440" marT="45720" marB="45720" anchor="ctr">
+                    <a:lnL w="9525" cap="flat" cmpd="sng" algn="ctr">
+                      <a:solidFill>
+                        <a:srgbClr val="C9D6E2"/>
+                      </a:solidFill>
+                      <a:prstDash val="solid"/>
+                      <a:round/>
+                      <a:headEnd type="none" w="med" len="med"/>
+                      <a:tailEnd type="none" w="med" len="med"/>
+                    </a:lnL>
+                    <a:lnR w="9525" cap="flat" cmpd="sng" algn="ctr">
+                      <a:solidFill>
+                        <a:srgbClr val="C9D6E2"/>
+                      </a:solidFill>
+                      <a:prstDash val="solid"/>
+                      <a:round/>
+                      <a:headEnd type="none" w="med" len="med"/>
+                      <a:tailEnd type="none" w="med" len="med"/>
+                    </a:lnR>
+                    <a:lnT w="9525" cap="flat" cmpd="sng" algn="ctr">
+                      <a:solidFill>
+                        <a:srgbClr val="C9D6E2"/>
+                      </a:solidFill>
+                      <a:prstDash val="solid"/>
+                      <a:round/>
+                      <a:headEnd type="none" w="med" len="med"/>
+                      <a:tailEnd type="none" w="med" len="med"/>
+                    </a:lnT>
+                    <a:lnB w="9525" cap="flat" cmpd="sng" algn="ctr">
+                      <a:solidFill>
+                        <a:srgbClr val="C9D6E2"/>
+                      </a:solidFill>
+                      <a:prstDash val="solid"/>
+                      <a:round/>
+                      <a:headEnd type="none" w="med" len="med"/>
+                      <a:tailEnd type="none" w="med" len="med"/>
+                    </a:lnB>
+                  </a:tcPr>
+                </a:tc>
+              </a:tr>
+            </a:tbl>
+          </a:graphicData>
+        </a:graphic>
+      </p:graphicFrame>
+      <p:sp>
+        <p:nvSpPr>
+          <p:cNvPr id="14" name="Text 10"/>
+          <p:cNvSpPr txBox="1"/>
+          <p:nvPr/>
+        </p:nvSpPr>
+        <p:spPr>
+          <a:xfrm>
+            <a:off x="640080" y="4114800"/>
+            <a:ext cx="4709160" cy="228600"/>
+          </a:xfrm>
+          <a:prstGeom prst="rect">
+            <a:avLst/>
+          </a:prstGeom>
+          <a:noFill/>
+          <a:ln/>
+        </p:spPr>
+        <p:txBody>
+          <a:bodyPr wrap="square" lIns="0" tIns="0" rIns="0" bIns="0" rtlCol="0" anchor="ctr"/>
+          <a:lstStyle/>
+          <a:p>
+            <a:pPr indent="0" marL="0">
+              <a:buNone/>
+            </a:pPr>
+            <a:r>
+              <a:rPr lang="en-US" sz="900" dirty="0">
+                <a:solidFill>
+                  <a:srgbClr val="5B6B7A"/>
+                </a:solidFill>
+                <a:latin typeface="Malgun Gothic" pitchFamily="34" charset="0"/>
+                <a:ea typeface="Malgun Gothic" pitchFamily="34" charset="-122"/>
+                <a:cs typeface="Malgun Gothic" pitchFamily="34" charset="-120"/>
+              </a:rPr>
+              <a:t>* 동일법 시행령 제14조에 따른 전문체육 대회</a:t>
+            </a:r>
+            <a:endParaRPr lang="en-US" sz="900" dirty="0"/>
+          </a:p>
+        </p:txBody>
+      </p:sp>
+      <p:sp>
+        <p:nvSpPr>
+          <p:cNvPr id="15" name="Shape 11"/>
+          <p:cNvSpPr/>
+          <p:nvPr/>
+        </p:nvSpPr>
+        <p:spPr>
+          <a:xfrm>
+            <a:off x="5669280" y="2029968"/>
+            <a:ext cx="3017520" cy="1097280"/>
+          </a:xfrm>
+          <a:prstGeom prst="roundRect">
+            <a:avLst>
+              <a:gd name="adj" fmla="val 10000"/>
+            </a:avLst>
+          </a:prstGeom>
+          <a:solidFill>
+            <a:srgbClr val="F1F6FA"/>
+          </a:solidFill>
+          <a:ln w="12700">
+            <a:solidFill>
+              <a:srgbClr val="F1F6FA"/>
+            </a:solidFill>
+            <a:prstDash val="solid"/>
+          </a:ln>
+        </p:spPr>
+      </p:sp>
+      <p:sp>
+        <p:nvSpPr>
+          <p:cNvPr id="16" name="Text 12"/>
+          <p:cNvSpPr txBox="1"/>
+          <p:nvPr/>
+        </p:nvSpPr>
+        <p:spPr>
+          <a:xfrm>
+            <a:off x="5852160" y="2103120"/>
+            <a:ext cx="2697480" cy="960120"/>
+          </a:xfrm>
+          <a:prstGeom prst="rect">
+            <a:avLst/>
+          </a:prstGeom>
+          <a:noFill/>
+          <a:ln/>
+        </p:spPr>
+        <p:txBody>
+          <a:bodyPr wrap="square" lIns="0" tIns="0" rIns="0" bIns="0" rtlCol="0" anchor="t"/>
+          <a:lstStyle/>
+          <a:p>
+            <a:pPr indent="0" marL="0">
+              <a:buNone/>
+            </a:pPr>
+            <a:r>
+              <a:rPr lang="en-US" sz="1050" b="1" dirty="0">
+                <a:solidFill>
+                  <a:srgbClr val="0B3C5D"/>
+                </a:solidFill>
+                <a:latin typeface="Malgun Gothic" pitchFamily="34" charset="0"/>
+                <a:ea typeface="Malgun Gothic" pitchFamily="34" charset="-122"/>
+                <a:cs typeface="Malgun Gothic" pitchFamily="34" charset="-120"/>
+              </a:rPr>
+              <a:t>가입 서비스 안내
+</a:t>
+            </a:r>
+            <a:endParaRPr lang="en-US" sz="1050" dirty="0"/>
+          </a:p>
+          <a:p>
+            <a:pPr indent="0" marL="0">
+              <a:buNone/>
+            </a:pPr>
+            <a:r>
+              <a:rPr lang="en-US" sz="1050" dirty="0">
+                <a:solidFill>
+                  <a:srgbClr val="1F2933"/>
+                </a:solidFill>
+                <a:latin typeface="Malgun Gothic" pitchFamily="34" charset="0"/>
+                <a:ea typeface="Malgun Gothic" pitchFamily="34" charset="-122"/>
+                <a:cs typeface="Malgun Gothic" pitchFamily="34" charset="-120"/>
+              </a:rPr>
+              <a:t>스포츠안전재단 </a:t>
+            </a:r>
+            <a:pPr indent="0" marL="0">
+              <a:buNone/>
+            </a:pPr>
+            <a:r>
+              <a:rPr lang="en-US" sz="1050" b="1" dirty="0">
+                <a:solidFill>
+                  <a:srgbClr val="0B3C5D"/>
+                </a:solidFill>
+                <a:latin typeface="Malgun Gothic" pitchFamily="34" charset="0"/>
+                <a:ea typeface="Malgun Gothic" pitchFamily="34" charset="-122"/>
+                <a:cs typeface="Malgun Gothic" pitchFamily="34" charset="-120"/>
+              </a:rPr>
+              <a:t>“주최자배상책임공제”
+</a:t>
+            </a:r>
+            <a:endParaRPr lang="en-US" sz="1050" dirty="0"/>
+          </a:p>
+          <a:p>
+            <a:pPr indent="0" marL="0">
+              <a:buNone/>
+            </a:pPr>
+            <a:r>
+              <a:rPr lang="en-US" sz="1050" dirty="0">
+                <a:solidFill>
+                  <a:srgbClr val="1F2933"/>
+                </a:solidFill>
+                <a:latin typeface="Malgun Gothic" pitchFamily="34" charset="0"/>
+                <a:ea typeface="Malgun Gothic" pitchFamily="34" charset="-122"/>
+                <a:cs typeface="Malgun Gothic" pitchFamily="34" charset="-120"/>
+              </a:rPr>
+              <a:t>담보구성: (필수) 대인 / (선택) 치료비, 대물, 물적손해 등</a:t>
+            </a:r>
+            <a:endParaRPr lang="en-US" sz="1050" dirty="0"/>
+          </a:p>
+        </p:txBody>
+      </p:sp>
+      <p:sp>
+        <p:nvSpPr>
+          <p:cNvPr id="17" name="Shape 13"/>
+          <p:cNvSpPr/>
+          <p:nvPr/>
+        </p:nvSpPr>
+        <p:spPr>
+          <a:xfrm>
+            <a:off x="5669280" y="3218688"/>
+            <a:ext cx="3017520" cy="1188720"/>
+          </a:xfrm>
+          <a:prstGeom prst="roundRect">
+            <a:avLst>
+              <a:gd name="adj" fmla="val 9231"/>
+            </a:avLst>
+          </a:prstGeom>
+          <a:solidFill>
+            <a:srgbClr val="0B3C5D"/>
+          </a:solidFill>
+          <a:ln w="12700">
+            <a:solidFill>
+              <a:srgbClr val="0B3C5D"/>
+            </a:solidFill>
+            <a:prstDash val="solid"/>
+          </a:ln>
+        </p:spPr>
+      </p:sp>
+      <p:sp>
+        <p:nvSpPr>
+          <p:cNvPr id="18" name="Text 14"/>
+          <p:cNvSpPr txBox="1"/>
+          <p:nvPr/>
+        </p:nvSpPr>
+        <p:spPr>
+          <a:xfrm>
+            <a:off x="5852160" y="3291840"/>
+            <a:ext cx="2697480" cy="274320"/>
+          </a:xfrm>
+          <a:prstGeom prst="rect">
+            <a:avLst/>
+          </a:prstGeom>
+          <a:noFill/>
+          <a:ln/>
+        </p:spPr>
+        <p:txBody>
+          <a:bodyPr wrap="square" lIns="0" tIns="0" rIns="0" bIns="0" rtlCol="0" anchor="ctr"/>
+          <a:lstStyle/>
+          <a:p>
+            <a:pPr indent="0" marL="0">
+              <a:buNone/>
+            </a:pPr>
+            <a:r>
+              <a:rPr lang="en-US" sz="1050" b="1" dirty="0">
+                <a:solidFill>
+                  <a:srgbClr val="DCEAF4"/>
+                </a:solidFill>
+                <a:latin typeface="Malgun Gothic" pitchFamily="34" charset="0"/>
+                <a:ea typeface="Malgun Gothic" pitchFamily="34" charset="-122"/>
+                <a:cs typeface="Malgun Gothic" pitchFamily="34" charset="-120"/>
+              </a:rPr>
+              <a:t>재난안전의무보험 가입기준</a:t>
+            </a:r>
+            <a:endParaRPr lang="en-US" sz="1050" dirty="0"/>
+          </a:p>
+        </p:txBody>
+      </p:sp>
+      <p:sp>
+        <p:nvSpPr>
+          <p:cNvPr id="19" name="Text 15"/>
+          <p:cNvSpPr txBox="1"/>
+          <p:nvPr/>
+        </p:nvSpPr>
+        <p:spPr>
+          <a:xfrm>
+            <a:off x="5852160" y="3566160"/>
+            <a:ext cx="2697480" cy="457200"/>
+          </a:xfrm>
+          <a:prstGeom prst="rect">
+            <a:avLst/>
+          </a:prstGeom>
+          <a:noFill/>
+          <a:ln/>
+        </p:spPr>
+        <p:txBody>
+          <a:bodyPr wrap="square" lIns="0" tIns="0" rIns="0" bIns="0" rtlCol="0" anchor="ctr"/>
+          <a:lstStyle/>
+          <a:p>
+            <a:pPr indent="0" marL="0">
+              <a:buNone/>
+            </a:pPr>
+            <a:r>
+              <a:rPr lang="en-US" sz="1300" b="1" dirty="0">
+                <a:solidFill>
+                  <a:srgbClr val="E0A526"/>
+                </a:solidFill>
+                <a:latin typeface="Malgun Gothic" pitchFamily="34" charset="0"/>
+                <a:ea typeface="Malgun Gothic" pitchFamily="34" charset="-122"/>
+                <a:cs typeface="Malgun Gothic" pitchFamily="34" charset="-120"/>
+              </a:rPr>
+              <a:t>“대인 담보 1억 5천만 원 이상 가입 필요”</a:t>
+            </a:r>
+            <a:endParaRPr lang="en-US" sz="1300" dirty="0"/>
+          </a:p>
+        </p:txBody>
+      </p:sp>
+      <p:sp>
+        <p:nvSpPr>
+          <p:cNvPr id="20" name="Text 16"/>
+          <p:cNvSpPr txBox="1"/>
+          <p:nvPr/>
+        </p:nvSpPr>
+        <p:spPr>
+          <a:xfrm>
+            <a:off x="5852160" y="4023360"/>
+            <a:ext cx="2697480" cy="347472"/>
+          </a:xfrm>
+          <a:prstGeom prst="rect">
+            <a:avLst/>
+          </a:prstGeom>
+          <a:noFill/>
+          <a:ln/>
+        </p:spPr>
+        <p:txBody>
+          <a:bodyPr wrap="square" lIns="0" tIns="0" rIns="0" bIns="0" rtlCol="0" anchor="t"/>
+          <a:lstStyle/>
+          <a:p>
+            <a:pPr indent="0" marL="0">
+              <a:buNone/>
+            </a:pPr>
+            <a:r>
+              <a:rPr lang="en-US" sz="900" dirty="0">
+                <a:solidFill>
+                  <a:srgbClr val="FFFFFF"/>
+                </a:solidFill>
+                <a:latin typeface="Malgun Gothic" pitchFamily="34" charset="0"/>
+                <a:ea typeface="Malgun Gothic" pitchFamily="34" charset="-122"/>
+                <a:cs typeface="Malgun Gothic" pitchFamily="34" charset="-120"/>
+              </a:rPr>
+              <a:t>※ 「재난 및 안전관리 기본법 시행령」 제84조의2(보상 한도 등) 의거</a:t>
+            </a:r>
+            <a:endParaRPr lang="en-US" sz="900" dirty="0"/>
+          </a:p>
+        </p:txBody>
+      </p:sp>
+      <p:sp>
+        <p:nvSpPr>
+          <p:cNvPr id="21" name="Text 17"/>
+          <p:cNvSpPr txBox="1"/>
+          <p:nvPr/>
+        </p:nvSpPr>
+        <p:spPr>
+          <a:xfrm>
+            <a:off x="457200" y="4732020"/>
+            <a:ext cx="8229600" cy="274320"/>
+          </a:xfrm>
+          <a:prstGeom prst="rect">
+            <a:avLst/>
+          </a:prstGeom>
+          <a:noFill/>
+          <a:ln/>
+        </p:spPr>
+        <p:txBody>
+          <a:bodyPr wrap="square" lIns="0" tIns="0" rIns="0" bIns="0" rtlCol="0" anchor="ctr"/>
+          <a:lstStyle/>
+          <a:p>
+            <a:pPr indent="0" marL="0">
+              <a:buNone/>
+            </a:pPr>
+            <a:r>
+              <a:rPr lang="en-US" sz="900" dirty="0">
+                <a:solidFill>
+                  <a:srgbClr val="5B6B7A"/>
+                </a:solidFill>
+                <a:latin typeface="Malgun Gothic" pitchFamily="34" charset="0"/>
+                <a:ea typeface="Malgun Gothic" pitchFamily="34" charset="-122"/>
+                <a:cs typeface="Malgun Gothic" pitchFamily="34" charset="-120"/>
+              </a:rPr>
+              <a:t>문의처: 홈페이지 insu.sportsafety.or.kr · 고객상담 1899-0547 · center@sports.or.kr · 서울 송파구 올림픽로 424 올림픽공원테니스경기장 3층  |  출처: 스포츠안전재단 「재난안전의무보험 가입기준 안내」 포스터 문안 그대로 옮김</a:t>
+            </a:r>
+            <a:endParaRPr lang="en-US" sz="900" dirty="0"/>
+          </a:p>
+        </p:txBody>
+      </p:sp>
+    </p:spTree>
+  </p:cSld>
+  <p:clrMapOvr>
+    <a:masterClrMapping/>
+  </p:clrMapOvr>
+</p:sld>
+</file>
+
+<file path=ppt/slides/slide15.xml><?xml version="1.0" encoding="utf-8"?>
+<p:sld xmlns:a="http://schemas.openxmlformats.org/drawingml/2006/main" xmlns:r="http://schemas.openxmlformats.org/officeDocument/2006/relationships" xmlns:p="http://schemas.openxmlformats.org/presentationml/2006/main">
+  <p:cSld name="Slide 15">
+    <p:bg>
+      <p:bgPr>
+        <a:solidFill>
+          <a:srgbClr val="FFFFFF"/>
+        </a:solidFill>
+      </p:bgPr>
+    </p:bg>
+    <p:spTree>
+      <p:nvGrpSpPr>
+        <p:cNvPr id="1" name=""/>
+        <p:cNvGrpSpPr/>
+        <p:nvPr/>
+      </p:nvGrpSpPr>
+      <p:grpSpPr>
+        <a:xfrm>
+          <a:off x="0" y="0"/>
+          <a:ext cx="0" cy="0"/>
+          <a:chOff x="0" y="0"/>
+          <a:chExt cx="0" cy="0"/>
+        </a:xfrm>
+      </p:grpSpPr>
+      <p:sp>
+        <p:nvSpPr>
+          <p:cNvPr id="2" name="Shape 0"/>
+          <p:cNvSpPr/>
+          <p:nvPr/>
+        </p:nvSpPr>
+        <p:spPr>
+          <a:xfrm>
+            <a:off x="457200" y="274320"/>
+            <a:ext cx="457200" cy="457200"/>
+          </a:xfrm>
+          <a:prstGeom prst="ellipse">
+            <a:avLst/>
+          </a:prstGeom>
+          <a:solidFill>
+            <a:srgbClr val="DCEAF4"/>
+          </a:solidFill>
+          <a:ln w="12700">
+            <a:solidFill>
+              <a:srgbClr val="DCEAF4"/>
+            </a:solidFill>
+            <a:prstDash val="solid"/>
+          </a:ln>
+        </p:spPr>
+      </p:sp>
+      <p:pic>
+        <p:nvPicPr>
+          <p:cNvPr id="3" name="Image 0" descr="preencoded.png">    </p:cNvPr>
+          <p:cNvPicPr>
+            <a:picLocks noChangeAspect="1"/>
+          </p:cNvPicPr>
+          <p:nvPr/>
+        </p:nvPicPr>
+        <p:blipFill>
+          <a:blip r:embed="rId1"/>
+          <a:stretch>
+            <a:fillRect/>
+          </a:stretch>
+        </p:blipFill>
+        <p:spPr>
+          <a:xfrm>
+            <a:off x="557784" y="374904"/>
+            <a:ext cx="256032" cy="256032"/>
+          </a:xfrm>
+          <a:prstGeom prst="rect">
+            <a:avLst/>
+          </a:prstGeom>
+        </p:spPr>
+      </p:pic>
+      <p:sp>
+        <p:nvSpPr>
+          <p:cNvPr id="4" name="Text 1"/>
+          <p:cNvSpPr txBox="1"/>
+          <p:nvPr/>
+        </p:nvSpPr>
+        <p:spPr>
+          <a:xfrm>
+            <a:off x="1051560" y="228600"/>
+            <a:ext cx="4754880" cy="548640"/>
+          </a:xfrm>
+          <a:prstGeom prst="rect">
+            <a:avLst/>
+          </a:prstGeom>
+          <a:noFill/>
+          <a:ln/>
+        </p:spPr>
+        <p:txBody>
+          <a:bodyPr wrap="square" lIns="0" tIns="0" rIns="0" bIns="0" rtlCol="0" anchor="ctr"/>
+          <a:lstStyle/>
+          <a:p>
+            <a:pPr indent="0" marL="0">
+              <a:buNone/>
+            </a:pPr>
+            <a:r>
+              <a:rPr lang="en-US" sz="2400" b="1" dirty="0">
+                <a:solidFill>
+                  <a:srgbClr val="0B3C5D"/>
+                </a:solidFill>
+                <a:latin typeface="Malgun Gothic" pitchFamily="34" charset="0"/>
+                <a:ea typeface="Malgun Gothic" pitchFamily="34" charset="-122"/>
+                <a:cs typeface="Malgun Gothic" pitchFamily="34" charset="-120"/>
+              </a:rPr>
               <a:t>시급한 개선 과제 Top 3</a:t>
             </a:r>
             <a:endParaRPr lang="en-US" sz="2400" dirty="0"/>
@@ -9343,7 +11101,7 @@
                           <a:ea typeface="Malgun Gothic" pitchFamily="34" charset="-122"/>
                           <a:cs typeface="Malgun Gothic" pitchFamily="34" charset="-120"/>
                         </a:rPr>
-                        <a:t>13</a:t>
+                        <a:t>13~14</a:t>
                       </a:r>
                       <a:endParaRPr lang="en-US" sz="1050" dirty="0">
                         <a:latin typeface="Malgun Gothic" charset="0"/>
@@ -9538,7 +11296,7 @@
                           <a:ea typeface="Malgun Gothic" pitchFamily="34" charset="-122"/>
                           <a:cs typeface="Malgun Gothic" pitchFamily="34" charset="-120"/>
                         </a:rPr>
-                        <a:t>재단 공식 안내 페이지(insu.sportsafety.or.kr) 병행 송출 가능</a:t>
+                        <a:t>14장은 재단 공식 포스터 문안 재구성 · 원본 이미지로 교체 가능</a:t>
                       </a:r>
                       <a:endParaRPr lang="en-US" sz="1050" dirty="0">
                         <a:latin typeface="Malgun Gothic" charset="0"/>
@@ -9670,7 +11428,7 @@
                           <a:ea typeface="Malgun Gothic" pitchFamily="34" charset="-122"/>
                           <a:cs typeface="Malgun Gothic" pitchFamily="34" charset="-120"/>
                         </a:rPr>
-                        <a:t>14</a:t>
+                        <a:t>15</a:t>
                       </a:r>
                       <a:endParaRPr lang="en-US" sz="1050" dirty="0">
                         <a:latin typeface="Malgun Gothic" charset="0"/>
